--- a/docs/content/ggplot_2/ggplot_2_activity.pptx
+++ b/docs/content/ggplot_2/ggplot_2_activity.pptx
@@ -16,6 +16,7 @@
     <p:sldId id="264" r:id="rId10"/>
     <p:sldId id="265" r:id="rId11"/>
     <p:sldId id="266" r:id="rId12"/>
+    <p:sldId id="267" r:id="rId13"/>
   </p:sldIdLst>
   <p:sldSz cx="9144000" cy="5143500" type="screen16x9"/>
   <p:notesSz cx="6858000" cy="9144000"/>
@@ -3402,7 +3403,7 @@
             </a:pPr>
             <a:r>
               <a:rPr/>
-              <a:t>Getting unstuck</a:t>
+              <a:t>Extension — out of class (~30–40 min)</a:t>
             </a:r>
           </a:p>
         </p:txBody>
@@ -3422,16 +3423,165 @@
           <a:bodyPr/>
           <a:lstStyle/>
           <a:p>
+            <a:pPr lvl="0" indent="0" marL="0">
+              <a:buNone/>
+            </a:pPr>
+            <a:r>
+              <a:rPr i="1"/>
+              <a:t>Turn this in with your worksheet. In class you zoomed a fixed window on </a:t>
+            </a:r>
+            <a:r>
+              <a:rPr i="1">
+                <a:latin typeface="Courier"/>
+              </a:rPr>
+              <a:t>weight_g</a:t>
+            </a:r>
+            <a:r>
+              <a:rPr i="1"/>
+              <a:t> vs </a:t>
+            </a:r>
+            <a:r>
+              <a:rPr i="1">
+                <a:latin typeface="Courier"/>
+              </a:rPr>
+              <a:t>height_cm</a:t>
+            </a:r>
+            <a:r>
+              <a:rPr i="1"/>
+              <a:t>. Now the variable pair </a:t>
+            </a:r>
+            <a:r>
+              <a:rPr b="1" i="1"/>
+              <a:t>and</a:t>
+            </a:r>
+            <a:r>
+              <a:rPr i="1"/>
+              <a:t> the window are yours.</a:t>
+            </a:r>
+          </a:p>
+          <a:p>
+            <a:pPr lvl="0" indent="0" marL="1270000">
+              <a:buNone/>
+            </a:pPr>
+            <a:r>
+              <a:rPr sz="2000" b="1"/>
+              <a:t>Important</a:t>
+            </a:r>
+          </a:p>
+          <a:p>
+            <a:pPr lvl="0" indent="0" marL="1270000">
+              <a:buNone/>
+            </a:pPr>
+            <a:r>
+              <a:rPr sz="2000" b="1"/>
+              <a:t>E2 and E3 must be handwritten</a:t>
+            </a:r>
+            <a:r>
+              <a:rPr sz="2000"/>
+              <a:t> on paper, photographed, and embedded (</a:t>
+            </a:r>
+            <a:r>
+              <a:rPr sz="2000">
+                <a:latin typeface="Courier"/>
+              </a:rPr>
+              <a:t>![caption](my_photo.jpg)</a:t>
+            </a:r>
+            <a:r>
+              <a:rPr sz="2000"/>
+              <a:t>). Typed answers to E2/E3 get </a:t>
+            </a:r>
+            <a:r>
+              <a:rPr sz="2000" b="1"/>
+              <a:t>at most half credit, even if correct</a:t>
+            </a:r>
+            <a:r>
+              <a:rPr sz="2000"/>
+              <a:t> — I want your own prediction and reasoning about </a:t>
+            </a:r>
+            <a:r>
+              <a:rPr sz="2000" i="1"/>
+              <a:t>your own</a:t>
+            </a:r>
+            <a:r>
+              <a:rPr sz="2000"/>
+              <a:t> numbers.</a:t>
+            </a:r>
+          </a:p>
+          <a:p>
+            <a:pPr lvl="0" indent="0" marL="0">
+              <a:spcBef>
+                <a:spcPts val="3000"/>
+              </a:spcBef>
+              <a:buNone/>
+            </a:pPr>
+            <a:r>
+              <a:rPr b="1"/>
+              <a:t>E1 · Your own zoom window (4 pts)</a:t>
+            </a:r>
+          </a:p>
+          <a:p>
             <a:pPr lvl="0" indent="-342900" marL="342900">
               <a:buAutoNum type="arabicPeriod"/>
             </a:pPr>
             <a:r>
+              <a:rPr/>
+              <a:t>Pick </a:t>
+            </a:r>
+            <a:r>
               <a:rPr b="1"/>
-              <a:t>Read the error message out loud.</a:t>
-            </a:r>
-            <a:r>
-              <a:rPr/>
-              <a:t> R usually names the line and the problem.</a:t>
+              <a:t>your own pair of numeric variables</a:t>
+            </a:r>
+            <a:r>
+              <a:rPr/>
+              <a:t> from </a:t>
+            </a:r>
+            <a:r>
+              <a:rPr>
+                <a:latin typeface="Courier"/>
+              </a:rPr>
+              <a:t>tree_df</a:t>
+            </a:r>
+            <a:r>
+              <a:rPr/>
+              <a:t> that class did </a:t>
+            </a:r>
+            <a:r>
+              <a:rPr i="1"/>
+              <a:t>not</a:t>
+            </a:r>
+            <a:r>
+              <a:rPr/>
+              <a:t> use together (not </a:t>
+            </a:r>
+            <a:r>
+              <a:rPr>
+                <a:latin typeface="Courier"/>
+              </a:rPr>
+              <a:t>weight_g</a:t>
+            </a:r>
+            <a:r>
+              <a:rPr/>
+              <a:t> vs </a:t>
+            </a:r>
+            <a:r>
+              <a:rPr>
+                <a:latin typeface="Courier"/>
+              </a:rPr>
+              <a:t>height_cm</a:t>
+            </a:r>
+            <a:r>
+              <a:rPr/>
+              <a:t>). </a:t>
+            </a:r>
+            <a:r>
+              <a:rPr>
+                <a:latin typeface="Courier"/>
+              </a:rPr>
+              <a:t>width_cm</a:t>
+            </a:r>
+            <a:r>
+              <a:rPr/>
+              <a:t> is available.</a:t>
             </a:r>
           </a:p>
           <a:p>
@@ -3439,42 +3589,36 @@
               <a:buAutoNum type="arabicPeriod"/>
             </a:pPr>
             <a:r>
+              <a:rPr/>
+              <a:t>Look at the range of your x-variable (</a:t>
+            </a:r>
+            <a:r>
+              <a:rPr>
+                <a:latin typeface="Courier"/>
+              </a:rPr>
+              <a:t>range()</a:t>
+            </a:r>
+            <a:r>
+              <a:rPr/>
+              <a:t> / </a:t>
+            </a:r>
+            <a:r>
+              <a:rPr>
+                <a:latin typeface="Courier"/>
+              </a:rPr>
+              <a:t>summary()</a:t>
+            </a:r>
+            <a:r>
+              <a:rPr/>
+              <a:t>), then pick a </a:t>
+            </a:r>
+            <a:r>
               <a:rPr b="1"/>
-              <a:t>Line looks wrong after zooming?</a:t>
-            </a:r>
-            <a:r>
-              <a:rPr/>
-              <a:t> Check whether you used </a:t>
-            </a:r>
-            <a:r>
-              <a:rPr>
-                <a:latin typeface="Courier"/>
-              </a:rPr>
-              <a:t>xlim()</a:t>
-            </a:r>
-            <a:r>
-              <a:rPr/>
-              <a:t>/</a:t>
-            </a:r>
-            <a:r>
-              <a:rPr>
-                <a:latin typeface="Courier"/>
-              </a:rPr>
-              <a:t>ylim()</a:t>
-            </a:r>
-            <a:r>
-              <a:rPr/>
-              <a:t> (deletes data) instead of </a:t>
-            </a:r>
-            <a:r>
-              <a:rPr>
-                <a:latin typeface="Courier"/>
-              </a:rPr>
-              <a:t>coord_cartesian()</a:t>
-            </a:r>
-            <a:r>
-              <a:rPr/>
-              <a:t> (keeps it).</a:t>
+              <a:t>zoom window that cuts the data roughly in half</a:t>
+            </a:r>
+            <a:r>
+              <a:rPr/>
+              <a:t> — a real cut, not a guess.</a:t>
             </a:r>
           </a:p>
           <a:p>
@@ -3482,42 +3626,38 @@
               <a:buAutoNum type="arabicPeriod"/>
             </a:pPr>
             <a:r>
-              <a:rPr b="1"/>
-              <a:t>Legend didn’t merge?</a:t>
-            </a:r>
-            <a:r>
-              <a:rPr/>
-              <a:t> </a:t>
-            </a:r>
-            <a:r>
-              <a:rPr>
-                <a:latin typeface="Courier"/>
-              </a:rPr>
-              <a:t>color</a:t>
-            </a:r>
-            <a:r>
-              <a:rPr/>
-              <a:t> and </a:t>
-            </a:r>
-            <a:r>
-              <a:rPr>
-                <a:latin typeface="Courier"/>
-              </a:rPr>
-              <a:t>shape</a:t>
-            </a:r>
-            <a:r>
-              <a:rPr/>
-              <a:t> (or the matching </a:t>
-            </a:r>
-            <a:r>
-              <a:rPr>
-                <a:latin typeface="Courier"/>
-              </a:rPr>
-              <a:t>labs()</a:t>
-            </a:r>
-            <a:r>
-              <a:rPr/>
-              <a:t> titles) must reference the exact same variable name.</a:t>
+              <a:rPr/>
+              <a:t>Build the </a:t>
+            </a:r>
+            <a:r>
+              <a:rPr>
+                <a:latin typeface="Courier"/>
+              </a:rPr>
+              <a:t>coord_cartesian()</a:t>
+            </a:r>
+            <a:r>
+              <a:rPr/>
+              <a:t> version and the </a:t>
+            </a:r>
+            <a:r>
+              <a:rPr>
+                <a:latin typeface="Courier"/>
+              </a:rPr>
+              <a:t>xlim()</a:t>
+            </a:r>
+            <a:r>
+              <a:rPr/>
+              <a:t> version of a scatter with </a:t>
+            </a:r>
+            <a:r>
+              <a:rPr>
+                <a:latin typeface="Courier"/>
+              </a:rPr>
+              <a:t>geom_smooth(method = "lm")</a:t>
+            </a:r>
+            <a:r>
+              <a:rPr/>
+              <a:t>, exactly like the in-class Part 3.</a:t>
             </a:r>
           </a:p>
           <a:p>
@@ -3525,18 +3665,124 @@
               <a:buAutoNum type="arabicPeriod"/>
             </a:pPr>
             <a:r>
+              <a:rPr/>
+              <a:t>Run </a:t>
+            </a:r>
+            <a:r>
+              <a:rPr>
+                <a:latin typeface="Courier"/>
+              </a:rPr>
+              <a:t>nrow(tree_df)</a:t>
+            </a:r>
+            <a:r>
+              <a:rPr/>
+              <a:t>, then </a:t>
+            </a:r>
+            <a:r>
+              <a:rPr>
+                <a:latin typeface="Courier"/>
+              </a:rPr>
+              <a:t>filter()</a:t>
+            </a:r>
+            <a:r>
+              <a:rPr/>
+              <a:t> </a:t>
+            </a:r>
+            <a:r>
+              <a:rPr>
+                <a:latin typeface="Courier"/>
+              </a:rPr>
+              <a:t>tree_df</a:t>
+            </a:r>
+            <a:r>
+              <a:rPr/>
+              <a:t> to your window and check </a:t>
+            </a:r>
+            <a:r>
+              <a:rPr>
+                <a:latin typeface="Courier"/>
+              </a:rPr>
+              <a:t>nrow()</a:t>
+            </a:r>
+            <a:r>
+              <a:rPr/>
+              <a:t> again — that’s the row count </a:t>
+            </a:r>
+            <a:r>
+              <a:rPr>
+                <a:latin typeface="Courier"/>
+              </a:rPr>
+              <a:t>xlim()</a:t>
+            </a:r>
+            <a:r>
+              <a:rPr/>
+              <a:t> is silently using.</a:t>
+            </a:r>
+          </a:p>
+          <a:p>
+            <a:pPr lvl="0" indent="0" marL="0">
+              <a:buNone/>
+            </a:pPr>
+            <a:r>
+              <a:rPr/>
+              <a:t>Record your exact window and both row counts (they’ll differ for everyone).</a:t>
+            </a:r>
+          </a:p>
+          <a:p>
+            <a:pPr lvl="0" indent="0" marL="0">
+              <a:spcBef>
+                <a:spcPts val="3000"/>
+              </a:spcBef>
+              <a:buNone/>
+            </a:pPr>
+            <a:r>
               <a:rPr b="1"/>
-              <a:t>Cheat sheets</a:t>
-            </a:r>
-            <a:r>
-              <a:rPr/>
-              <a:t> — </a:t>
-            </a:r>
-            <a:r>
-              <a:rPr>
-                <a:hlinkClick r:id="rId2"/>
-              </a:rPr>
-              <a:t>https://posit.co/resources/cheatsheets/</a:t>
+              <a:t>E2 · Predict, then check — ✍️ by hand (3 pts)</a:t>
+            </a:r>
+          </a:p>
+          <a:p>
+            <a:pPr lvl="0" indent="0" marL="0">
+              <a:buNone/>
+            </a:pPr>
+            <a:r>
+              <a:rPr b="1"/>
+              <a:t>Before running E1:</a:t>
+            </a:r>
+            <a:r>
+              <a:rPr/>
+              <a:t> write your variable pair and window, and predict — will the </a:t>
+            </a:r>
+            <a:r>
+              <a:rPr>
+                <a:latin typeface="Courier"/>
+              </a:rPr>
+              <a:t>xlim()</a:t>
+            </a:r>
+            <a:r>
+              <a:rPr/>
+              <a:t> trend line be the same slope as the </a:t>
+            </a:r>
+            <a:r>
+              <a:rPr>
+                <a:latin typeface="Courier"/>
+              </a:rPr>
+              <a:t>coord_cartesian()</a:t>
+            </a:r>
+            <a:r>
+              <a:rPr/>
+              <a:t> one, steeper, or shallower? Also predict, as a number, how many rows land in your window. Run the code, then write how close your row-count guess was and whether the trend lines differed as predicted.</a:t>
+            </a:r>
+          </a:p>
+          <a:p>
+            <a:pPr lvl="0" indent="0" marL="0">
+              <a:spcBef>
+                <a:spcPts val="3000"/>
+              </a:spcBef>
+              <a:buNone/>
+            </a:pPr>
+            <a:r>
+              <a:rPr b="1"/>
+              <a:t>E3 · Explain it — ✍️ by hand, using YOUR numbers (3 pts)</a:t>
             </a:r>
           </a:p>
           <a:p>
@@ -3544,12 +3790,92 @@
               <a:buAutoNum type="arabicPeriod"/>
             </a:pPr>
             <a:r>
-              <a:rPr b="1"/>
-              <a:t>Bring the exact error</a:t>
-            </a:r>
-            <a:r>
-              <a:rPr/>
-              <a:t> (copy-paste it) to class, Canvas, or office hours.</a:t>
+              <a:rPr/>
+              <a:t>Using your before/after row counts, explain why </a:t>
+            </a:r>
+            <a:r>
+              <a:rPr>
+                <a:latin typeface="Courier"/>
+              </a:rPr>
+              <a:t>xlim()</a:t>
+            </a:r>
+            <a:r>
+              <a:rPr/>
+              <a:t> gave a different line than </a:t>
+            </a:r>
+            <a:r>
+              <a:rPr>
+                <a:latin typeface="Courier"/>
+              </a:rPr>
+              <a:t>coord_cartesian()</a:t>
+            </a:r>
+            <a:r>
+              <a:rPr/>
+              <a:t> for </a:t>
+            </a:r>
+            <a:r>
+              <a:rPr i="1"/>
+              <a:t>your</a:t>
+            </a:r>
+            <a:r>
+              <a:rPr/>
+              <a:t> window. If the counts came out equal, explain how that can happen.</a:t>
+            </a:r>
+          </a:p>
+          <a:p>
+            <a:pPr lvl="0" indent="-342900" marL="342900">
+              <a:buAutoNum type="arabicPeriod"/>
+            </a:pPr>
+            <a:r>
+              <a:rPr/>
+              <a:t>In your own words, why is it dangerous that </a:t>
+            </a:r>
+            <a:r>
+              <a:rPr>
+                <a:latin typeface="Courier"/>
+              </a:rPr>
+              <a:t>xlim()</a:t>
+            </a:r>
+            <a:r>
+              <a:rPr/>
+              <a:t>/</a:t>
+            </a:r>
+            <a:r>
+              <a:rPr>
+                <a:latin typeface="Courier"/>
+              </a:rPr>
+              <a:t>ylim()</a:t>
+            </a:r>
+            <a:r>
+              <a:rPr/>
+              <a:t> delete rows </a:t>
+            </a:r>
+            <a:r>
+              <a:rPr i="1"/>
+              <a:t>silently</a:t>
+            </a:r>
+            <a:r>
+              <a:rPr/>
+              <a:t>? Give a realistic case where that silent deletion leads to a wrong conclusion.</a:t>
+            </a:r>
+          </a:p>
+          <a:p>
+            <a:pPr lvl="0" indent="-342900" marL="342900">
+              <a:buAutoNum type="arabicPeriod"/>
+            </a:pPr>
+            <a:r>
+              <a:rPr/>
+              <a:t>Name the theme you chose in the in-class Part 4 and say, in a sentence or two, why you’d pick it over </a:t>
+            </a:r>
+            <a:r>
+              <a:rPr>
+                <a:latin typeface="Courier"/>
+              </a:rPr>
+              <a:t>theme_grey()</a:t>
+            </a:r>
+            <a:r>
+              <a:rPr/>
+              <a:t> for a figure in a report.</a:t>
             </a:r>
           </a:p>
         </p:txBody>
@@ -3560,6 +3886,205 @@
 </file>
 
 <file path=ppt/slides/slide11.xml><?xml version="1.0" encoding="utf-8"?>
+<p:sld xmlns:a="http://schemas.openxmlformats.org/drawingml/2006/main" xmlns:r="http://schemas.openxmlformats.org/officeDocument/2006/relationships" xmlns:p="http://schemas.openxmlformats.org/presentationml/2006/main">
+  <p:cSld>
+    <p:spTree>
+      <p:nvGrpSpPr>
+        <p:cNvPr id="1" name=""/>
+        <p:cNvGrpSpPr/>
+        <p:nvPr/>
+      </p:nvGrpSpPr>
+      <p:grpSpPr>
+        <a:xfrm>
+          <a:off x="0" y="0"/>
+          <a:ext cx="0" cy="0"/>
+          <a:chOff x="0" y="0"/>
+          <a:chExt cx="0" cy="0"/>
+        </a:xfrm>
+      </p:grpSpPr>
+      <p:sp>
+        <p:nvSpPr>
+          <p:cNvPr id="2" name="Title 1"/>
+          <p:cNvSpPr>
+            <a:spLocks noGrp="1"/>
+          </p:cNvSpPr>
+          <p:nvPr>
+            <p:ph type="title"/>
+          </p:nvPr>
+        </p:nvSpPr>
+        <p:spPr>
+          <a:xfrm>
+            <a:off x="0" y="0"/>
+            <a:ext cx="9144000" cy="582780"/>
+          </a:xfrm>
+        </p:spPr>
+        <p:txBody>
+          <a:bodyPr/>
+          <a:lstStyle/>
+          <a:p>
+            <a:pPr lvl="0" indent="0" marL="0">
+              <a:buNone/>
+            </a:pPr>
+            <a:r>
+              <a:rPr/>
+              <a:t>Getting unstuck</a:t>
+            </a:r>
+          </a:p>
+        </p:txBody>
+      </p:sp>
+      <p:sp>
+        <p:nvSpPr>
+          <p:cNvPr id="3" name="Content Placeholder 2"/>
+          <p:cNvSpPr>
+            <a:spLocks noGrp="1"/>
+          </p:cNvSpPr>
+          <p:nvPr>
+            <p:ph idx="1"/>
+          </p:nvPr>
+        </p:nvSpPr>
+        <p:spPr/>
+        <p:txBody>
+          <a:bodyPr/>
+          <a:lstStyle/>
+          <a:p>
+            <a:pPr lvl="0" indent="-342900" marL="342900">
+              <a:buAutoNum type="arabicPeriod"/>
+            </a:pPr>
+            <a:r>
+              <a:rPr b="1"/>
+              <a:t>Read the error message out loud.</a:t>
+            </a:r>
+            <a:r>
+              <a:rPr/>
+              <a:t> R usually names the line and the problem.</a:t>
+            </a:r>
+          </a:p>
+          <a:p>
+            <a:pPr lvl="0" indent="-342900" marL="342900">
+              <a:buAutoNum type="arabicPeriod"/>
+            </a:pPr>
+            <a:r>
+              <a:rPr b="1"/>
+              <a:t>Line looks wrong after zooming?</a:t>
+            </a:r>
+            <a:r>
+              <a:rPr/>
+              <a:t> Check whether you used </a:t>
+            </a:r>
+            <a:r>
+              <a:rPr>
+                <a:latin typeface="Courier"/>
+              </a:rPr>
+              <a:t>xlim()</a:t>
+            </a:r>
+            <a:r>
+              <a:rPr/>
+              <a:t>/</a:t>
+            </a:r>
+            <a:r>
+              <a:rPr>
+                <a:latin typeface="Courier"/>
+              </a:rPr>
+              <a:t>ylim()</a:t>
+            </a:r>
+            <a:r>
+              <a:rPr/>
+              <a:t> (deletes data) instead of </a:t>
+            </a:r>
+            <a:r>
+              <a:rPr>
+                <a:latin typeface="Courier"/>
+              </a:rPr>
+              <a:t>coord_cartesian()</a:t>
+            </a:r>
+            <a:r>
+              <a:rPr/>
+              <a:t> (keeps it).</a:t>
+            </a:r>
+          </a:p>
+          <a:p>
+            <a:pPr lvl="0" indent="-342900" marL="342900">
+              <a:buAutoNum type="arabicPeriod"/>
+            </a:pPr>
+            <a:r>
+              <a:rPr b="1"/>
+              <a:t>Legend didn’t merge?</a:t>
+            </a:r>
+            <a:r>
+              <a:rPr/>
+              <a:t> </a:t>
+            </a:r>
+            <a:r>
+              <a:rPr>
+                <a:latin typeface="Courier"/>
+              </a:rPr>
+              <a:t>color</a:t>
+            </a:r>
+            <a:r>
+              <a:rPr/>
+              <a:t> and </a:t>
+            </a:r>
+            <a:r>
+              <a:rPr>
+                <a:latin typeface="Courier"/>
+              </a:rPr>
+              <a:t>shape</a:t>
+            </a:r>
+            <a:r>
+              <a:rPr/>
+              <a:t> (or the matching </a:t>
+            </a:r>
+            <a:r>
+              <a:rPr>
+                <a:latin typeface="Courier"/>
+              </a:rPr>
+              <a:t>labs()</a:t>
+            </a:r>
+            <a:r>
+              <a:rPr/>
+              <a:t> titles) must reference the exact same variable name.</a:t>
+            </a:r>
+          </a:p>
+          <a:p>
+            <a:pPr lvl="0" indent="-342900" marL="342900">
+              <a:buAutoNum type="arabicPeriod"/>
+            </a:pPr>
+            <a:r>
+              <a:rPr b="1"/>
+              <a:t>Cheat sheets</a:t>
+            </a:r>
+            <a:r>
+              <a:rPr/>
+              <a:t> — </a:t>
+            </a:r>
+            <a:r>
+              <a:rPr>
+                <a:hlinkClick r:id="rId2"/>
+              </a:rPr>
+              <a:t>https://posit.co/resources/cheatsheets/</a:t>
+            </a:r>
+          </a:p>
+          <a:p>
+            <a:pPr lvl="0" indent="-342900" marL="342900">
+              <a:buAutoNum type="arabicPeriod"/>
+            </a:pPr>
+            <a:r>
+              <a:rPr b="1"/>
+              <a:t>Bring the exact error</a:t>
+            </a:r>
+            <a:r>
+              <a:rPr/>
+              <a:t> (copy-paste it) to class, Canvas, or office hours.</a:t>
+            </a:r>
+          </a:p>
+        </p:txBody>
+      </p:sp>
+    </p:spTree>
+  </p:cSld>
+</p:sld>
+</file>
+
+<file path=ppt/slides/slide12.xml><?xml version="1.0" encoding="utf-8"?>
 <p:sld xmlns:a="http://schemas.openxmlformats.org/drawingml/2006/main" xmlns:r="http://schemas.openxmlformats.org/officeDocument/2006/relationships" xmlns:p="http://schemas.openxmlformats.org/presentationml/2006/main">
   <p:cSld>
     <p:spTree>
@@ -3596,7 +4121,7 @@
             </a:pPr>
             <a:r>
               <a:rPr i="1"/>
-              <a:t>End of Worksheet 04. Next: Worksheet 05 covers wrangling with filter, select, mutate, and arrange.</a:t>
+              <a:t>End of the GGplot II worksheet. Next: wrangling with filter, select, mutate, and arrange.</a:t>
             </a:r>
           </a:p>
         </p:txBody>
